--- a/project-report/MTech4SEM_review.pptx
+++ b/project-report/MTech4SEM_review.pptx
@@ -1221,7 +1221,7 @@
           <a:p>
             <a:r>
               <a:rPr lang="en-US" dirty="0"/>
-              <a:t>Optional: swap image to system_architecture.png for a diagram-first slide.</a:t>
+              <a:t/>
             </a:r>
             <a:endParaRPr lang="en-US" dirty="0"/>
           </a:p>
